--- a/enterprise-data-knowledge-architecture-editable.pptx
+++ b/enterprise-data-knowledge-architecture-editable.pptx
@@ -5,9 +5,9 @@
     <p:sldMasterId id="2147483648" r:id="rId1"/>
   </p:sldMasterIdLst>
   <p:sldIdLst>
-    <p:sldId id="256" r:id="rId7"/>
+    <p:sldId id="256" r:id="rId2"/>
   </p:sldIdLst>
-  <p:sldSz cx="12191695" cy="6858000" type="screen4x3"/>
+  <p:sldSz cx="12192000" cy="6858000"/>
   <p:notesSz cx="6858000" cy="9144000"/>
   <p:defaultTextStyle>
     <a:defPPr>
@@ -104,6 +104,22 @@
       </a:defRPr>
     </a:lvl9pPr>
   </p:defaultTextStyle>
+  <p:extLst>
+    <p:ext uri="{EFAFB233-063F-42B5-8137-9DF3F51BA10A}">
+      <p15:sldGuideLst xmlns:p15="http://schemas.microsoft.com/office/powerpoint/2012/main">
+        <p15:guide id="1" orient="horz" pos="2160">
+          <p15:clr>
+            <a:srgbClr val="A4A3A4"/>
+          </p15:clr>
+        </p15:guide>
+        <p15:guide id="2" pos="2880">
+          <p15:clr>
+            <a:srgbClr val="A4A3A4"/>
+          </p15:clr>
+        </p15:guide>
+      </p15:sldGuideLst>
+    </p:ext>
+  </p:extLst>
 </p:presentation>
 </file>
 
@@ -145,10 +161,9 @@
           <a:lstStyle/>
           <a:p>
             <a:r>
-              <a:rPr lang="en-US" smtClean="0"/>
+              <a:rPr lang="en-US"/>
               <a:t>Click to edit Master title style</a:t>
             </a:r>
-            <a:endParaRPr lang="en-US"/>
           </a:p>
         </p:txBody>
       </p:sp>
@@ -264,10 +279,9 @@
           </a:lstStyle>
           <a:p>
             <a:r>
-              <a:rPr lang="en-US" smtClean="0"/>
+              <a:rPr lang="en-US"/>
               <a:t>Click to edit Master subtitle style</a:t>
             </a:r>
-            <a:endParaRPr lang="en-US"/>
           </a:p>
         </p:txBody>
       </p:sp>
@@ -288,7 +302,7 @@
           <a:p>
             <a:fld id="{5BCAD085-E8A6-8845-BD4E-CB4CCA059FC4}" type="datetimeFigureOut">
               <a:rPr lang="en-US" smtClean="0"/>
-              <a:t>1/27/13</a:t>
+              <a:t>9/17/26</a:t>
             </a:fld>
             <a:endParaRPr lang="en-US"/>
           </a:p>
@@ -382,10 +396,9 @@
           <a:lstStyle/>
           <a:p>
             <a:r>
-              <a:rPr lang="en-US" smtClean="0"/>
+              <a:rPr lang="en-US"/>
               <a:t>Click to edit Master title style</a:t>
             </a:r>
-            <a:endParaRPr lang="en-US"/>
           </a:p>
         </p:txBody>
       </p:sp>
@@ -406,38 +419,37 @@
           <a:p>
             <a:pPr lvl="0"/>
             <a:r>
-              <a:rPr lang="en-US" smtClean="0"/>
+              <a:rPr lang="en-US"/>
               <a:t>Click to edit Master text styles</a:t>
             </a:r>
           </a:p>
           <a:p>
             <a:pPr lvl="1"/>
             <a:r>
-              <a:rPr lang="en-US" smtClean="0"/>
+              <a:rPr lang="en-US"/>
               <a:t>Second level</a:t>
             </a:r>
           </a:p>
           <a:p>
             <a:pPr lvl="2"/>
             <a:r>
-              <a:rPr lang="en-US" smtClean="0"/>
+              <a:rPr lang="en-US"/>
               <a:t>Third level</a:t>
             </a:r>
           </a:p>
           <a:p>
             <a:pPr lvl="3"/>
             <a:r>
-              <a:rPr lang="en-US" smtClean="0"/>
+              <a:rPr lang="en-US"/>
               <a:t>Fourth level</a:t>
             </a:r>
           </a:p>
           <a:p>
             <a:pPr lvl="4"/>
             <a:r>
-              <a:rPr lang="en-US" smtClean="0"/>
+              <a:rPr lang="en-US"/>
               <a:t>Fifth level</a:t>
             </a:r>
-            <a:endParaRPr lang="en-US"/>
           </a:p>
         </p:txBody>
       </p:sp>
@@ -458,7 +470,7 @@
           <a:p>
             <a:fld id="{5BCAD085-E8A6-8845-BD4E-CB4CCA059FC4}" type="datetimeFigureOut">
               <a:rPr lang="en-US" smtClean="0"/>
-              <a:t>1/27/13</a:t>
+              <a:t>9/17/26</a:t>
             </a:fld>
             <a:endParaRPr lang="en-US"/>
           </a:p>
@@ -557,10 +569,9 @@
           <a:lstStyle/>
           <a:p>
             <a:r>
-              <a:rPr lang="en-US" smtClean="0"/>
+              <a:rPr lang="en-US"/>
               <a:t>Click to edit Master title style</a:t>
             </a:r>
-            <a:endParaRPr lang="en-US"/>
           </a:p>
         </p:txBody>
       </p:sp>
@@ -586,38 +597,37 @@
           <a:p>
             <a:pPr lvl="0"/>
             <a:r>
-              <a:rPr lang="en-US" smtClean="0"/>
+              <a:rPr lang="en-US"/>
               <a:t>Click to edit Master text styles</a:t>
             </a:r>
           </a:p>
           <a:p>
             <a:pPr lvl="1"/>
             <a:r>
-              <a:rPr lang="en-US" smtClean="0"/>
+              <a:rPr lang="en-US"/>
               <a:t>Second level</a:t>
             </a:r>
           </a:p>
           <a:p>
             <a:pPr lvl="2"/>
             <a:r>
-              <a:rPr lang="en-US" smtClean="0"/>
+              <a:rPr lang="en-US"/>
               <a:t>Third level</a:t>
             </a:r>
           </a:p>
           <a:p>
             <a:pPr lvl="3"/>
             <a:r>
-              <a:rPr lang="en-US" smtClean="0"/>
+              <a:rPr lang="en-US"/>
               <a:t>Fourth level</a:t>
             </a:r>
           </a:p>
           <a:p>
             <a:pPr lvl="4"/>
             <a:r>
-              <a:rPr lang="en-US" smtClean="0"/>
+              <a:rPr lang="en-US"/>
               <a:t>Fifth level</a:t>
             </a:r>
-            <a:endParaRPr lang="en-US"/>
           </a:p>
         </p:txBody>
       </p:sp>
@@ -638,7 +648,7 @@
           <a:p>
             <a:fld id="{5BCAD085-E8A6-8845-BD4E-CB4CCA059FC4}" type="datetimeFigureOut">
               <a:rPr lang="en-US" smtClean="0"/>
-              <a:t>1/27/13</a:t>
+              <a:t>9/17/26</a:t>
             </a:fld>
             <a:endParaRPr lang="en-US"/>
           </a:p>
@@ -732,10 +742,9 @@
           <a:lstStyle/>
           <a:p>
             <a:r>
-              <a:rPr lang="en-US" smtClean="0"/>
+              <a:rPr lang="en-US"/>
               <a:t>Click to edit Master title style</a:t>
             </a:r>
-            <a:endParaRPr lang="en-US"/>
           </a:p>
         </p:txBody>
       </p:sp>
@@ -756,38 +765,37 @@
           <a:p>
             <a:pPr lvl="0"/>
             <a:r>
-              <a:rPr lang="en-US" smtClean="0"/>
+              <a:rPr lang="en-US"/>
               <a:t>Click to edit Master text styles</a:t>
             </a:r>
           </a:p>
           <a:p>
             <a:pPr lvl="1"/>
             <a:r>
-              <a:rPr lang="en-US" smtClean="0"/>
+              <a:rPr lang="en-US"/>
               <a:t>Second level</a:t>
             </a:r>
           </a:p>
           <a:p>
             <a:pPr lvl="2"/>
             <a:r>
-              <a:rPr lang="en-US" smtClean="0"/>
+              <a:rPr lang="en-US"/>
               <a:t>Third level</a:t>
             </a:r>
           </a:p>
           <a:p>
             <a:pPr lvl="3"/>
             <a:r>
-              <a:rPr lang="en-US" smtClean="0"/>
+              <a:rPr lang="en-US"/>
               <a:t>Fourth level</a:t>
             </a:r>
           </a:p>
           <a:p>
             <a:pPr lvl="4"/>
             <a:r>
-              <a:rPr lang="en-US" smtClean="0"/>
+              <a:rPr lang="en-US"/>
               <a:t>Fifth level</a:t>
             </a:r>
-            <a:endParaRPr lang="en-US"/>
           </a:p>
         </p:txBody>
       </p:sp>
@@ -808,7 +816,7 @@
           <a:p>
             <a:fld id="{5BCAD085-E8A6-8845-BD4E-CB4CCA059FC4}" type="datetimeFigureOut">
               <a:rPr lang="en-US" smtClean="0"/>
-              <a:t>1/27/13</a:t>
+              <a:t>9/17/26</a:t>
             </a:fld>
             <a:endParaRPr lang="en-US"/>
           </a:p>
@@ -911,10 +919,9 @@
           </a:lstStyle>
           <a:p>
             <a:r>
-              <a:rPr lang="en-US" smtClean="0"/>
+              <a:rPr lang="en-US"/>
               <a:t>Click to edit Master title style</a:t>
             </a:r>
-            <a:endParaRPr lang="en-US"/>
           </a:p>
         </p:txBody>
       </p:sp>
@@ -1031,7 +1038,7 @@
           <a:p>
             <a:pPr lvl="0"/>
             <a:r>
-              <a:rPr lang="en-US" smtClean="0"/>
+              <a:rPr lang="en-US"/>
               <a:t>Click to edit Master text styles</a:t>
             </a:r>
           </a:p>
@@ -1054,7 +1061,7 @@
           <a:p>
             <a:fld id="{5BCAD085-E8A6-8845-BD4E-CB4CCA059FC4}" type="datetimeFigureOut">
               <a:rPr lang="en-US" smtClean="0"/>
-              <a:t>1/27/13</a:t>
+              <a:t>9/17/26</a:t>
             </a:fld>
             <a:endParaRPr lang="en-US"/>
           </a:p>
@@ -1148,10 +1155,9 @@
           <a:lstStyle/>
           <a:p>
             <a:r>
-              <a:rPr lang="en-US" smtClean="0"/>
+              <a:rPr lang="en-US"/>
               <a:t>Click to edit Master title style</a:t>
             </a:r>
-            <a:endParaRPr lang="en-US"/>
           </a:p>
         </p:txBody>
       </p:sp>
@@ -1205,38 +1211,37 @@
           <a:p>
             <a:pPr lvl="0"/>
             <a:r>
-              <a:rPr lang="en-US" smtClean="0"/>
+              <a:rPr lang="en-US"/>
               <a:t>Click to edit Master text styles</a:t>
             </a:r>
           </a:p>
           <a:p>
             <a:pPr lvl="1"/>
             <a:r>
-              <a:rPr lang="en-US" smtClean="0"/>
+              <a:rPr lang="en-US"/>
               <a:t>Second level</a:t>
             </a:r>
           </a:p>
           <a:p>
             <a:pPr lvl="2"/>
             <a:r>
-              <a:rPr lang="en-US" smtClean="0"/>
+              <a:rPr lang="en-US"/>
               <a:t>Third level</a:t>
             </a:r>
           </a:p>
           <a:p>
             <a:pPr lvl="3"/>
             <a:r>
-              <a:rPr lang="en-US" smtClean="0"/>
+              <a:rPr lang="en-US"/>
               <a:t>Fourth level</a:t>
             </a:r>
           </a:p>
           <a:p>
             <a:pPr lvl="4"/>
             <a:r>
-              <a:rPr lang="en-US" smtClean="0"/>
+              <a:rPr lang="en-US"/>
               <a:t>Fifth level</a:t>
             </a:r>
-            <a:endParaRPr lang="en-US"/>
           </a:p>
         </p:txBody>
       </p:sp>
@@ -1290,38 +1295,37 @@
           <a:p>
             <a:pPr lvl="0"/>
             <a:r>
-              <a:rPr lang="en-US" smtClean="0"/>
+              <a:rPr lang="en-US"/>
               <a:t>Click to edit Master text styles</a:t>
             </a:r>
           </a:p>
           <a:p>
             <a:pPr lvl="1"/>
             <a:r>
-              <a:rPr lang="en-US" smtClean="0"/>
+              <a:rPr lang="en-US"/>
               <a:t>Second level</a:t>
             </a:r>
           </a:p>
           <a:p>
             <a:pPr lvl="2"/>
             <a:r>
-              <a:rPr lang="en-US" smtClean="0"/>
+              <a:rPr lang="en-US"/>
               <a:t>Third level</a:t>
             </a:r>
           </a:p>
           <a:p>
             <a:pPr lvl="3"/>
             <a:r>
-              <a:rPr lang="en-US" smtClean="0"/>
+              <a:rPr lang="en-US"/>
               <a:t>Fourth level</a:t>
             </a:r>
           </a:p>
           <a:p>
             <a:pPr lvl="4"/>
             <a:r>
-              <a:rPr lang="en-US" smtClean="0"/>
+              <a:rPr lang="en-US"/>
               <a:t>Fifth level</a:t>
             </a:r>
-            <a:endParaRPr lang="en-US"/>
           </a:p>
         </p:txBody>
       </p:sp>
@@ -1342,7 +1346,7 @@
           <a:p>
             <a:fld id="{5BCAD085-E8A6-8845-BD4E-CB4CCA059FC4}" type="datetimeFigureOut">
               <a:rPr lang="en-US" smtClean="0"/>
-              <a:t>1/27/13</a:t>
+              <a:t>9/17/26</a:t>
             </a:fld>
             <a:endParaRPr lang="en-US"/>
           </a:p>
@@ -1440,10 +1444,9 @@
           </a:lstStyle>
           <a:p>
             <a:r>
-              <a:rPr lang="en-US" smtClean="0"/>
+              <a:rPr lang="en-US"/>
               <a:t>Click to edit Master title style</a:t>
             </a:r>
-            <a:endParaRPr lang="en-US"/>
           </a:p>
         </p:txBody>
       </p:sp>
@@ -1506,7 +1509,7 @@
           <a:p>
             <a:pPr lvl="0"/>
             <a:r>
-              <a:rPr lang="en-US" smtClean="0"/>
+              <a:rPr lang="en-US"/>
               <a:t>Click to edit Master text styles</a:t>
             </a:r>
           </a:p>
@@ -1562,38 +1565,37 @@
           <a:p>
             <a:pPr lvl="0"/>
             <a:r>
-              <a:rPr lang="en-US" smtClean="0"/>
+              <a:rPr lang="en-US"/>
               <a:t>Click to edit Master text styles</a:t>
             </a:r>
           </a:p>
           <a:p>
             <a:pPr lvl="1"/>
             <a:r>
-              <a:rPr lang="en-US" smtClean="0"/>
+              <a:rPr lang="en-US"/>
               <a:t>Second level</a:t>
             </a:r>
           </a:p>
           <a:p>
             <a:pPr lvl="2"/>
             <a:r>
-              <a:rPr lang="en-US" smtClean="0"/>
+              <a:rPr lang="en-US"/>
               <a:t>Third level</a:t>
             </a:r>
           </a:p>
           <a:p>
             <a:pPr lvl="3"/>
             <a:r>
-              <a:rPr lang="en-US" smtClean="0"/>
+              <a:rPr lang="en-US"/>
               <a:t>Fourth level</a:t>
             </a:r>
           </a:p>
           <a:p>
             <a:pPr lvl="4"/>
             <a:r>
-              <a:rPr lang="en-US" smtClean="0"/>
+              <a:rPr lang="en-US"/>
               <a:t>Fifth level</a:t>
             </a:r>
-            <a:endParaRPr lang="en-US"/>
           </a:p>
         </p:txBody>
       </p:sp>
@@ -1656,7 +1658,7 @@
           <a:p>
             <a:pPr lvl="0"/>
             <a:r>
-              <a:rPr lang="en-US" smtClean="0"/>
+              <a:rPr lang="en-US"/>
               <a:t>Click to edit Master text styles</a:t>
             </a:r>
           </a:p>
@@ -1712,38 +1714,37 @@
           <a:p>
             <a:pPr lvl="0"/>
             <a:r>
-              <a:rPr lang="en-US" smtClean="0"/>
+              <a:rPr lang="en-US"/>
               <a:t>Click to edit Master text styles</a:t>
             </a:r>
           </a:p>
           <a:p>
             <a:pPr lvl="1"/>
             <a:r>
-              <a:rPr lang="en-US" smtClean="0"/>
+              <a:rPr lang="en-US"/>
               <a:t>Second level</a:t>
             </a:r>
           </a:p>
           <a:p>
             <a:pPr lvl="2"/>
             <a:r>
-              <a:rPr lang="en-US" smtClean="0"/>
+              <a:rPr lang="en-US"/>
               <a:t>Third level</a:t>
             </a:r>
           </a:p>
           <a:p>
             <a:pPr lvl="3"/>
             <a:r>
-              <a:rPr lang="en-US" smtClean="0"/>
+              <a:rPr lang="en-US"/>
               <a:t>Fourth level</a:t>
             </a:r>
           </a:p>
           <a:p>
             <a:pPr lvl="4"/>
             <a:r>
-              <a:rPr lang="en-US" smtClean="0"/>
+              <a:rPr lang="en-US"/>
               <a:t>Fifth level</a:t>
             </a:r>
-            <a:endParaRPr lang="en-US"/>
           </a:p>
         </p:txBody>
       </p:sp>
@@ -1764,7 +1765,7 @@
           <a:p>
             <a:fld id="{5BCAD085-E8A6-8845-BD4E-CB4CCA059FC4}" type="datetimeFigureOut">
               <a:rPr lang="en-US" smtClean="0"/>
-              <a:t>1/27/13</a:t>
+              <a:t>9/17/26</a:t>
             </a:fld>
             <a:endParaRPr lang="en-US"/>
           </a:p>
@@ -1858,10 +1859,9 @@
           <a:lstStyle/>
           <a:p>
             <a:r>
-              <a:rPr lang="en-US" smtClean="0"/>
+              <a:rPr lang="en-US"/>
               <a:t>Click to edit Master title style</a:t>
             </a:r>
-            <a:endParaRPr lang="en-US"/>
           </a:p>
         </p:txBody>
       </p:sp>
@@ -1882,7 +1882,7 @@
           <a:p>
             <a:fld id="{5BCAD085-E8A6-8845-BD4E-CB4CCA059FC4}" type="datetimeFigureOut">
               <a:rPr lang="en-US" smtClean="0"/>
-              <a:t>1/27/13</a:t>
+              <a:t>9/17/26</a:t>
             </a:fld>
             <a:endParaRPr lang="en-US"/>
           </a:p>
@@ -1977,7 +1977,7 @@
           <a:p>
             <a:fld id="{5BCAD085-E8A6-8845-BD4E-CB4CCA059FC4}" type="datetimeFigureOut">
               <a:rPr lang="en-US" smtClean="0"/>
-              <a:t>1/27/13</a:t>
+              <a:t>9/17/26</a:t>
             </a:fld>
             <a:endParaRPr lang="en-US"/>
           </a:p>
@@ -2080,10 +2080,9 @@
           </a:lstStyle>
           <a:p>
             <a:r>
-              <a:rPr lang="en-US" smtClean="0"/>
+              <a:rPr lang="en-US"/>
               <a:t>Click to edit Master title style</a:t>
             </a:r>
-            <a:endParaRPr lang="en-US"/>
           </a:p>
         </p:txBody>
       </p:sp>
@@ -2137,38 +2136,37 @@
           <a:p>
             <a:pPr lvl="0"/>
             <a:r>
-              <a:rPr lang="en-US" smtClean="0"/>
+              <a:rPr lang="en-US"/>
               <a:t>Click to edit Master text styles</a:t>
             </a:r>
           </a:p>
           <a:p>
             <a:pPr lvl="1"/>
             <a:r>
-              <a:rPr lang="en-US" smtClean="0"/>
+              <a:rPr lang="en-US"/>
               <a:t>Second level</a:t>
             </a:r>
           </a:p>
           <a:p>
             <a:pPr lvl="2"/>
             <a:r>
-              <a:rPr lang="en-US" smtClean="0"/>
+              <a:rPr lang="en-US"/>
               <a:t>Third level</a:t>
             </a:r>
           </a:p>
           <a:p>
             <a:pPr lvl="3"/>
             <a:r>
-              <a:rPr lang="en-US" smtClean="0"/>
+              <a:rPr lang="en-US"/>
               <a:t>Fourth level</a:t>
             </a:r>
           </a:p>
           <a:p>
             <a:pPr lvl="4"/>
             <a:r>
-              <a:rPr lang="en-US" smtClean="0"/>
+              <a:rPr lang="en-US"/>
               <a:t>Fifth level</a:t>
             </a:r>
-            <a:endParaRPr lang="en-US"/>
           </a:p>
         </p:txBody>
       </p:sp>
@@ -2231,7 +2229,7 @@
           <a:p>
             <a:pPr lvl="0"/>
             <a:r>
-              <a:rPr lang="en-US" smtClean="0"/>
+              <a:rPr lang="en-US"/>
               <a:t>Click to edit Master text styles</a:t>
             </a:r>
           </a:p>
@@ -2254,7 +2252,7 @@
           <a:p>
             <a:fld id="{5BCAD085-E8A6-8845-BD4E-CB4CCA059FC4}" type="datetimeFigureOut">
               <a:rPr lang="en-US" smtClean="0"/>
-              <a:t>1/27/13</a:t>
+              <a:t>9/17/26</a:t>
             </a:fld>
             <a:endParaRPr lang="en-US"/>
           </a:p>
@@ -2357,10 +2355,9 @@
           </a:lstStyle>
           <a:p>
             <a:r>
-              <a:rPr lang="en-US" smtClean="0"/>
+              <a:rPr lang="en-US"/>
               <a:t>Click to edit Master title style</a:t>
             </a:r>
-            <a:endParaRPr lang="en-US"/>
           </a:p>
         </p:txBody>
       </p:sp>
@@ -2484,7 +2481,7 @@
           <a:p>
             <a:pPr lvl="0"/>
             <a:r>
-              <a:rPr lang="en-US" smtClean="0"/>
+              <a:rPr lang="en-US"/>
               <a:t>Click to edit Master text styles</a:t>
             </a:r>
           </a:p>
@@ -2507,7 +2504,7 @@
           <a:p>
             <a:fld id="{5BCAD085-E8A6-8845-BD4E-CB4CCA059FC4}" type="datetimeFigureOut">
               <a:rPr lang="en-US" smtClean="0"/>
-              <a:t>1/27/13</a:t>
+              <a:t>9/17/26</a:t>
             </a:fld>
             <a:endParaRPr lang="en-US"/>
           </a:p>
@@ -2616,10 +2613,9 @@
           <a:lstStyle/>
           <a:p>
             <a:r>
-              <a:rPr lang="en-US" smtClean="0"/>
+              <a:rPr lang="en-US"/>
               <a:t>Click to edit Master title style</a:t>
             </a:r>
-            <a:endParaRPr lang="en-US"/>
           </a:p>
         </p:txBody>
       </p:sp>
@@ -2650,38 +2646,37 @@
           <a:p>
             <a:pPr lvl="0"/>
             <a:r>
-              <a:rPr lang="en-US" smtClean="0"/>
+              <a:rPr lang="en-US"/>
               <a:t>Click to edit Master text styles</a:t>
             </a:r>
           </a:p>
           <a:p>
             <a:pPr lvl="1"/>
             <a:r>
-              <a:rPr lang="en-US" smtClean="0"/>
+              <a:rPr lang="en-US"/>
               <a:t>Second level</a:t>
             </a:r>
           </a:p>
           <a:p>
             <a:pPr lvl="2"/>
             <a:r>
-              <a:rPr lang="en-US" smtClean="0"/>
+              <a:rPr lang="en-US"/>
               <a:t>Third level</a:t>
             </a:r>
           </a:p>
           <a:p>
             <a:pPr lvl="3"/>
             <a:r>
-              <a:rPr lang="en-US" smtClean="0"/>
+              <a:rPr lang="en-US"/>
               <a:t>Fourth level</a:t>
             </a:r>
           </a:p>
           <a:p>
             <a:pPr lvl="4"/>
             <a:r>
-              <a:rPr lang="en-US" smtClean="0"/>
+              <a:rPr lang="en-US"/>
               <a:t>Fifth level</a:t>
             </a:r>
-            <a:endParaRPr lang="en-US"/>
           </a:p>
         </p:txBody>
       </p:sp>
@@ -2720,7 +2715,7 @@
           <a:p>
             <a:fld id="{5BCAD085-E8A6-8845-BD4E-CB4CCA059FC4}" type="datetimeFigureOut">
               <a:rPr lang="en-US" smtClean="0"/>
-              <a:t>1/27/13</a:t>
+              <a:t>9/17/26</a:t>
             </a:fld>
             <a:endParaRPr lang="en-US"/>
           </a:p>
@@ -3079,7 +3074,7 @@
 </file>
 
 <file path=ppt/slides/slide1.xml><?xml version="1.0" encoding="utf-8"?>
-<p:sld xmlns:a="http://schemas.openxmlformats.org/drawingml/2006/main" xmlns:p="http://schemas.openxmlformats.org/presentationml/2006/main" xmlns:r="http://schemas.openxmlformats.org/officeDocument/2006/relationships">
+<p:sld xmlns:a="http://schemas.openxmlformats.org/drawingml/2006/main" xmlns:r="http://schemas.openxmlformats.org/officeDocument/2006/relationships" xmlns:p="http://schemas.openxmlformats.org/presentationml/2006/main">
   <p:cSld>
     <p:spTree>
       <p:nvGrpSpPr>
@@ -3087,7 +3082,14 @@
         <p:cNvGrpSpPr/>
         <p:nvPr/>
       </p:nvGrpSpPr>
-      <p:grpSpPr/>
+      <p:grpSpPr>
+        <a:xfrm>
+          <a:off x="0" y="0"/>
+          <a:ext cx="0" cy="0"/>
+          <a:chOff x="0" y="0"/>
+          <a:chExt cx="0" cy="0"/>
+        </a:xfrm>
+      </p:grpSpPr>
       <p:sp>
         <p:nvSpPr>
           <p:cNvPr id="2" name="Rectangle 1"/>
@@ -3129,6 +3131,7 @@
           <a:lstStyle/>
           <a:p>
             <a:pPr algn="ctr"/>
+            <a:endParaRPr/>
           </a:p>
         </p:txBody>
       </p:sp>
@@ -3149,7 +3152,7 @@
           <a:noFill/>
         </p:spPr>
         <p:txBody>
-          <a:bodyPr wrap="square" lIns="0" rIns="0" tIns="0" bIns="0">
+          <a:bodyPr wrap="square" lIns="0" tIns="0" rIns="0" bIns="0">
             <a:spAutoFit/>
           </a:bodyPr>
           <a:lstStyle/>
@@ -3184,7 +3187,7 @@
           <a:noFill/>
         </p:spPr>
         <p:txBody>
-          <a:bodyPr wrap="square" lIns="0" rIns="0" tIns="0" bIns="0">
+          <a:bodyPr wrap="square" lIns="0" tIns="0" rIns="0" bIns="0">
             <a:spAutoFit/>
           </a:bodyPr>
           <a:lstStyle/>
@@ -3245,6 +3248,7 @@
           <a:lstStyle/>
           <a:p>
             <a:pPr algn="ctr"/>
+            <a:endParaRPr/>
           </a:p>
         </p:txBody>
       </p:sp>
@@ -3265,7 +3269,7 @@
           <a:noFill/>
         </p:spPr>
         <p:txBody>
-          <a:bodyPr wrap="square" lIns="0" rIns="0" tIns="0" bIns="0">
+          <a:bodyPr wrap="square" lIns="0" tIns="0" rIns="0" bIns="0">
             <a:spAutoFit/>
           </a:bodyPr>
           <a:lstStyle/>
@@ -3300,7 +3304,7 @@
           <a:noFill/>
         </p:spPr>
         <p:txBody>
-          <a:bodyPr wrap="square" lIns="0" rIns="0" tIns="0" bIns="0">
+          <a:bodyPr wrap="square" lIns="0" tIns="0" rIns="0" bIns="0">
             <a:spAutoFit/>
           </a:bodyPr>
           <a:lstStyle/>
@@ -3357,7 +3361,7 @@
           </a:fontRef>
         </p:style>
         <p:txBody>
-          <a:bodyPr rtlCol="0" anchor="ctr" lIns="36576" rIns="36576" tIns="18288" bIns="18288" wrap="square"/>
+          <a:bodyPr wrap="square" lIns="36576" tIns="18288" rIns="36576" bIns="18288" rtlCol="0" anchor="ctr"/>
           <a:lstStyle/>
           <a:p>
             <a:pPr algn="ctr"/>
@@ -3412,7 +3416,7 @@
           </a:fontRef>
         </p:style>
         <p:txBody>
-          <a:bodyPr rtlCol="0" anchor="ctr" lIns="36576" rIns="36576" tIns="18288" bIns="18288" wrap="square"/>
+          <a:bodyPr wrap="square" lIns="36576" tIns="18288" rIns="36576" bIns="18288" rtlCol="0" anchor="ctr"/>
           <a:lstStyle/>
           <a:p>
             <a:pPr algn="ctr"/>
@@ -3467,7 +3471,7 @@
           </a:fontRef>
         </p:style>
         <p:txBody>
-          <a:bodyPr rtlCol="0" anchor="ctr" lIns="36576" rIns="36576" tIns="18288" bIns="18288" wrap="square"/>
+          <a:bodyPr wrap="square" lIns="36576" tIns="18288" rIns="36576" bIns="18288" rtlCol="0" anchor="ctr"/>
           <a:lstStyle/>
           <a:p>
             <a:pPr algn="ctr"/>
@@ -3522,7 +3526,7 @@
           </a:fontRef>
         </p:style>
         <p:txBody>
-          <a:bodyPr rtlCol="0" anchor="ctr" lIns="36576" rIns="36576" tIns="18288" bIns="18288" wrap="square"/>
+          <a:bodyPr wrap="square" lIns="36576" tIns="18288" rIns="36576" bIns="18288" rtlCol="0" anchor="ctr"/>
           <a:lstStyle/>
           <a:p>
             <a:pPr algn="ctr"/>
@@ -3577,7 +3581,7 @@
           </a:fontRef>
         </p:style>
         <p:txBody>
-          <a:bodyPr rtlCol="0" anchor="ctr" lIns="36576" rIns="36576" tIns="18288" bIns="18288" wrap="square"/>
+          <a:bodyPr wrap="square" lIns="36576" tIns="18288" rIns="36576" bIns="18288" rtlCol="0" anchor="ctr"/>
           <a:lstStyle/>
           <a:p>
             <a:pPr algn="ctr"/>
@@ -3632,7 +3636,7 @@
           </a:fontRef>
         </p:style>
         <p:txBody>
-          <a:bodyPr rtlCol="0" anchor="ctr" lIns="36576" rIns="36576" tIns="18288" bIns="18288" wrap="square"/>
+          <a:bodyPr wrap="square" lIns="36576" tIns="18288" rIns="36576" bIns="18288" rtlCol="0" anchor="ctr"/>
           <a:lstStyle/>
           <a:p>
             <a:pPr algn="ctr"/>
@@ -3687,7 +3691,7 @@
           </a:fontRef>
         </p:style>
         <p:txBody>
-          <a:bodyPr rtlCol="0" anchor="ctr" lIns="36576" rIns="36576" tIns="18288" bIns="18288" wrap="square"/>
+          <a:bodyPr wrap="square" lIns="36576" tIns="18288" rIns="36576" bIns="18288" rtlCol="0" anchor="ctr"/>
           <a:lstStyle/>
           <a:p>
             <a:pPr algn="ctr"/>
@@ -3756,7 +3760,7 @@
           <a:noFill/>
         </p:spPr>
         <p:txBody>
-          <a:bodyPr wrap="square" lIns="0" rIns="0" tIns="0" bIns="0">
+          <a:bodyPr wrap="square" lIns="0" tIns="0" rIns="0" bIns="0">
             <a:spAutoFit/>
           </a:bodyPr>
           <a:lstStyle/>
@@ -3817,6 +3821,7 @@
           <a:lstStyle/>
           <a:p>
             <a:pPr algn="ctr"/>
+            <a:endParaRPr/>
           </a:p>
         </p:txBody>
       </p:sp>
@@ -3837,7 +3842,7 @@
           <a:noFill/>
         </p:spPr>
         <p:txBody>
-          <a:bodyPr wrap="square" lIns="0" rIns="0" tIns="0" bIns="0">
+          <a:bodyPr wrap="square" lIns="0" tIns="0" rIns="0" bIns="0">
             <a:spAutoFit/>
           </a:bodyPr>
           <a:lstStyle/>
@@ -3872,7 +3877,7 @@
           <a:noFill/>
         </p:spPr>
         <p:txBody>
-          <a:bodyPr wrap="square" lIns="0" rIns="0" tIns="0" bIns="0">
+          <a:bodyPr wrap="square" lIns="0" tIns="0" rIns="0" bIns="0">
             <a:spAutoFit/>
           </a:bodyPr>
           <a:lstStyle/>
@@ -3929,7 +3934,7 @@
           </a:fontRef>
         </p:style>
         <p:txBody>
-          <a:bodyPr rtlCol="0" anchor="ctr" lIns="36576" rIns="36576" tIns="18288" bIns="18288" wrap="square"/>
+          <a:bodyPr wrap="square" lIns="36576" tIns="18288" rIns="36576" bIns="18288" rtlCol="0" anchor="ctr"/>
           <a:lstStyle/>
           <a:p>
             <a:pPr algn="ctr"/>
@@ -3996,7 +4001,7 @@
           </a:fontRef>
         </p:style>
         <p:txBody>
-          <a:bodyPr rtlCol="0" anchor="ctr" lIns="36576" rIns="36576" tIns="18288" bIns="18288" wrap="square"/>
+          <a:bodyPr wrap="square" lIns="36576" tIns="18288" rIns="36576" bIns="18288" rtlCol="0" anchor="ctr"/>
           <a:lstStyle/>
           <a:p>
             <a:pPr algn="ctr"/>
@@ -4063,7 +4068,7 @@
           </a:fontRef>
         </p:style>
         <p:txBody>
-          <a:bodyPr rtlCol="0" anchor="ctr" lIns="36576" rIns="36576" tIns="18288" bIns="18288" wrap="square"/>
+          <a:bodyPr wrap="square" lIns="36576" tIns="18288" rIns="36576" bIns="18288" rtlCol="0" anchor="ctr"/>
           <a:lstStyle/>
           <a:p>
             <a:pPr algn="ctr"/>
@@ -4130,7 +4135,7 @@
           </a:fontRef>
         </p:style>
         <p:txBody>
-          <a:bodyPr rtlCol="0" anchor="ctr" lIns="36576" rIns="36576" tIns="18288" bIns="18288" wrap="square"/>
+          <a:bodyPr wrap="square" lIns="36576" tIns="18288" rIns="36576" bIns="18288" rtlCol="0" anchor="ctr"/>
           <a:lstStyle/>
           <a:p>
             <a:pPr algn="ctr"/>
@@ -4197,7 +4202,7 @@
           </a:fontRef>
         </p:style>
         <p:txBody>
-          <a:bodyPr rtlCol="0" anchor="ctr" lIns="36576" rIns="36576" tIns="18288" bIns="18288" wrap="square"/>
+          <a:bodyPr wrap="square" lIns="36576" tIns="18288" rIns="36576" bIns="18288" rtlCol="0" anchor="ctr"/>
           <a:lstStyle/>
           <a:p>
             <a:pPr algn="ctr"/>
@@ -4264,7 +4269,7 @@
           </a:fontRef>
         </p:style>
         <p:txBody>
-          <a:bodyPr rtlCol="0" anchor="ctr" lIns="36576" rIns="36576" tIns="18288" bIns="18288" wrap="square"/>
+          <a:bodyPr wrap="square" lIns="36576" tIns="18288" rIns="36576" bIns="18288" rtlCol="0" anchor="ctr"/>
           <a:lstStyle/>
           <a:p>
             <a:pPr algn="ctr"/>
@@ -4331,7 +4336,7 @@
           </a:fontRef>
         </p:style>
         <p:txBody>
-          <a:bodyPr rtlCol="0" anchor="ctr" lIns="36576" rIns="36576" tIns="18288" bIns="18288" wrap="square"/>
+          <a:bodyPr wrap="square" lIns="36576" tIns="18288" rIns="36576" bIns="18288" rtlCol="0" anchor="ctr"/>
           <a:lstStyle/>
           <a:p>
             <a:pPr algn="ctr"/>
@@ -4398,7 +4403,7 @@
           </a:fontRef>
         </p:style>
         <p:txBody>
-          <a:bodyPr rtlCol="0" anchor="ctr" lIns="36576" rIns="36576" tIns="18288" bIns="18288" wrap="square"/>
+          <a:bodyPr wrap="square" lIns="36576" tIns="18288" rIns="36576" bIns="18288" rtlCol="0" anchor="ctr"/>
           <a:lstStyle/>
           <a:p>
             <a:pPr algn="ctr"/>
@@ -4443,7 +4448,7 @@
           <a:noFill/>
         </p:spPr>
         <p:txBody>
-          <a:bodyPr wrap="square" lIns="0" rIns="0" tIns="0" bIns="0">
+          <a:bodyPr wrap="square" lIns="0" tIns="0" rIns="0" bIns="0">
             <a:spAutoFit/>
           </a:bodyPr>
           <a:lstStyle/>
@@ -4514,7 +4519,7 @@
           <a:noFill/>
         </p:spPr>
         <p:txBody>
-          <a:bodyPr wrap="square" lIns="0" rIns="0" tIns="0" bIns="0">
+          <a:bodyPr wrap="square" lIns="0" tIns="0" rIns="0" bIns="0">
             <a:spAutoFit/>
           </a:bodyPr>
           <a:lstStyle/>
@@ -4575,6 +4580,7 @@
           <a:lstStyle/>
           <a:p>
             <a:pPr algn="ctr"/>
+            <a:endParaRPr/>
           </a:p>
         </p:txBody>
       </p:sp>
@@ -4595,7 +4601,7 @@
           <a:noFill/>
         </p:spPr>
         <p:txBody>
-          <a:bodyPr wrap="square" lIns="0" rIns="0" tIns="0" bIns="0">
+          <a:bodyPr wrap="square" lIns="0" tIns="0" rIns="0" bIns="0">
             <a:spAutoFit/>
           </a:bodyPr>
           <a:lstStyle/>
@@ -4630,7 +4636,7 @@
           <a:noFill/>
         </p:spPr>
         <p:txBody>
-          <a:bodyPr wrap="square" lIns="0" rIns="0" tIns="0" bIns="0">
+          <a:bodyPr wrap="square" lIns="0" tIns="0" rIns="0" bIns="0">
             <a:spAutoFit/>
           </a:bodyPr>
           <a:lstStyle/>
@@ -4687,7 +4693,7 @@
           </a:fontRef>
         </p:style>
         <p:txBody>
-          <a:bodyPr rtlCol="0" anchor="ctr" lIns="36576" rIns="36576" tIns="18288" bIns="18288" wrap="square"/>
+          <a:bodyPr wrap="square" lIns="36576" tIns="18288" rIns="36576" bIns="18288" rtlCol="0" anchor="ctr"/>
           <a:lstStyle/>
           <a:p>
             <a:pPr algn="ctr"/>
@@ -4754,7 +4760,7 @@
           </a:fontRef>
         </p:style>
         <p:txBody>
-          <a:bodyPr rtlCol="0" anchor="ctr" lIns="36576" rIns="36576" tIns="18288" bIns="18288" wrap="square"/>
+          <a:bodyPr wrap="square" lIns="36576" tIns="18288" rIns="36576" bIns="18288" rtlCol="0" anchor="ctr"/>
           <a:lstStyle/>
           <a:p>
             <a:pPr algn="ctr"/>
@@ -4821,7 +4827,7 @@
           </a:fontRef>
         </p:style>
         <p:txBody>
-          <a:bodyPr rtlCol="0" anchor="ctr" lIns="36576" rIns="36576" tIns="18288" bIns="18288" wrap="square"/>
+          <a:bodyPr wrap="square" lIns="36576" tIns="18288" rIns="36576" bIns="18288" rtlCol="0" anchor="ctr"/>
           <a:lstStyle/>
           <a:p>
             <a:pPr algn="ctr"/>
@@ -4888,7 +4894,7 @@
           </a:fontRef>
         </p:style>
         <p:txBody>
-          <a:bodyPr rtlCol="0" anchor="ctr" lIns="36576" rIns="36576" tIns="18288" bIns="18288" wrap="square"/>
+          <a:bodyPr wrap="square" lIns="36576" tIns="18288" rIns="36576" bIns="18288" rtlCol="0" anchor="ctr"/>
           <a:lstStyle/>
           <a:p>
             <a:pPr algn="ctr"/>
@@ -4955,7 +4961,7 @@
           </a:fontRef>
         </p:style>
         <p:txBody>
-          <a:bodyPr rtlCol="0" anchor="ctr" lIns="36576" rIns="36576" tIns="18288" bIns="18288" wrap="square"/>
+          <a:bodyPr wrap="square" lIns="36576" tIns="18288" rIns="36576" bIns="18288" rtlCol="0" anchor="ctr"/>
           <a:lstStyle/>
           <a:p>
             <a:pPr algn="ctr"/>
@@ -5022,7 +5028,7 @@
           </a:fontRef>
         </p:style>
         <p:txBody>
-          <a:bodyPr rtlCol="0" anchor="ctr" lIns="36576" rIns="36576" tIns="18288" bIns="18288" wrap="square"/>
+          <a:bodyPr wrap="square" lIns="36576" tIns="18288" rIns="36576" bIns="18288" rtlCol="0" anchor="ctr"/>
           <a:lstStyle/>
           <a:p>
             <a:pPr algn="ctr"/>
@@ -5077,7 +5083,7 @@
           </a:fontRef>
         </p:style>
         <p:txBody>
-          <a:bodyPr rtlCol="0" anchor="ctr" lIns="36576" rIns="36576" tIns="18288" bIns="18288" wrap="square"/>
+          <a:bodyPr wrap="square" lIns="36576" tIns="18288" rIns="36576" bIns="18288" rtlCol="0" anchor="ctr"/>
           <a:lstStyle/>
           <a:p>
             <a:pPr algn="ctr"/>
@@ -5132,7 +5138,7 @@
           </a:fontRef>
         </p:style>
         <p:txBody>
-          <a:bodyPr rtlCol="0" anchor="ctr" lIns="36576" rIns="36576" tIns="18288" bIns="18288" wrap="square"/>
+          <a:bodyPr wrap="square" lIns="36576" tIns="18288" rIns="36576" bIns="18288" rtlCol="0" anchor="ctr"/>
           <a:lstStyle/>
           <a:p>
             <a:pPr algn="ctr"/>
@@ -5187,7 +5193,7 @@
           </a:fontRef>
         </p:style>
         <p:txBody>
-          <a:bodyPr rtlCol="0" anchor="ctr" lIns="36576" rIns="36576" tIns="18288" bIns="18288" wrap="square"/>
+          <a:bodyPr wrap="square" lIns="36576" tIns="18288" rIns="36576" bIns="18288" rtlCol="0" anchor="ctr"/>
           <a:lstStyle/>
           <a:p>
             <a:pPr algn="ctr"/>
@@ -5242,7 +5248,7 @@
           </a:fontRef>
         </p:style>
         <p:txBody>
-          <a:bodyPr rtlCol="0" anchor="ctr" lIns="36576" rIns="36576" tIns="18288" bIns="18288" wrap="square"/>
+          <a:bodyPr wrap="square" lIns="36576" tIns="18288" rIns="36576" bIns="18288" rtlCol="0" anchor="ctr"/>
           <a:lstStyle/>
           <a:p>
             <a:pPr algn="ctr"/>
@@ -5297,7 +5303,7 @@
           </a:fontRef>
         </p:style>
         <p:txBody>
-          <a:bodyPr rtlCol="0" anchor="ctr" lIns="36576" rIns="36576" tIns="18288" bIns="18288" wrap="square"/>
+          <a:bodyPr wrap="square" lIns="36576" tIns="18288" rIns="36576" bIns="18288" rtlCol="0" anchor="ctr"/>
           <a:lstStyle/>
           <a:p>
             <a:pPr algn="ctr"/>
@@ -5366,7 +5372,7 @@
           <a:noFill/>
         </p:spPr>
         <p:txBody>
-          <a:bodyPr wrap="square" lIns="0" rIns="0" tIns="0" bIns="0">
+          <a:bodyPr wrap="square" lIns="0" tIns="0" rIns="0" bIns="0">
             <a:spAutoFit/>
           </a:bodyPr>
           <a:lstStyle/>
@@ -5427,6 +5433,7 @@
           <a:lstStyle/>
           <a:p>
             <a:pPr algn="ctr"/>
+            <a:endParaRPr/>
           </a:p>
         </p:txBody>
       </p:sp>
@@ -5447,7 +5454,7 @@
           <a:noFill/>
         </p:spPr>
         <p:txBody>
-          <a:bodyPr wrap="square" lIns="0" rIns="0" tIns="0" bIns="0">
+          <a:bodyPr wrap="square" lIns="0" tIns="0" rIns="0" bIns="0">
             <a:spAutoFit/>
           </a:bodyPr>
           <a:lstStyle/>
@@ -5482,7 +5489,7 @@
           <a:noFill/>
         </p:spPr>
         <p:txBody>
-          <a:bodyPr wrap="square" lIns="0" rIns="0" tIns="0" bIns="0">
+          <a:bodyPr wrap="square" lIns="0" tIns="0" rIns="0" bIns="0">
             <a:spAutoFit/>
           </a:bodyPr>
           <a:lstStyle/>
@@ -5539,7 +5546,7 @@
           </a:fontRef>
         </p:style>
         <p:txBody>
-          <a:bodyPr rtlCol="0" anchor="ctr" lIns="36576" rIns="36576" tIns="18288" bIns="18288" wrap="square"/>
+          <a:bodyPr wrap="square" lIns="36576" tIns="18288" rIns="36576" bIns="18288" rtlCol="0" anchor="ctr"/>
           <a:lstStyle/>
           <a:p>
             <a:pPr algn="ctr"/>
@@ -5594,7 +5601,7 @@
           </a:fontRef>
         </p:style>
         <p:txBody>
-          <a:bodyPr rtlCol="0" anchor="ctr" lIns="36576" rIns="36576" tIns="18288" bIns="18288" wrap="square"/>
+          <a:bodyPr wrap="square" lIns="36576" tIns="18288" rIns="36576" bIns="18288" rtlCol="0" anchor="ctr"/>
           <a:lstStyle/>
           <a:p>
             <a:pPr algn="ctr"/>
@@ -5649,7 +5656,7 @@
           </a:fontRef>
         </p:style>
         <p:txBody>
-          <a:bodyPr rtlCol="0" anchor="ctr" lIns="36576" rIns="36576" tIns="18288" bIns="18288" wrap="square"/>
+          <a:bodyPr wrap="square" lIns="36576" tIns="18288" rIns="36576" bIns="18288" rtlCol="0" anchor="ctr"/>
           <a:lstStyle/>
           <a:p>
             <a:pPr algn="ctr"/>
@@ -5704,7 +5711,7 @@
           </a:fontRef>
         </p:style>
         <p:txBody>
-          <a:bodyPr rtlCol="0" anchor="ctr" lIns="36576" rIns="36576" tIns="18288" bIns="18288" wrap="square"/>
+          <a:bodyPr wrap="square" lIns="36576" tIns="18288" rIns="36576" bIns="18288" rtlCol="0" anchor="ctr"/>
           <a:lstStyle/>
           <a:p>
             <a:pPr algn="ctr"/>
@@ -5759,19 +5766,25 @@
           </a:fontRef>
         </p:style>
         <p:txBody>
-          <a:bodyPr rtlCol="0" anchor="ctr" lIns="36576" rIns="36576" tIns="18288" bIns="18288" wrap="square"/>
+          <a:bodyPr wrap="square" lIns="36576" tIns="18288" rIns="36576" bIns="18288" rtlCol="0" anchor="ctr"/>
           <a:lstStyle/>
           <a:p>
             <a:pPr algn="ctr"/>
             <a:r>
-              <a:rPr sz="1000" b="0">
+              <a:rPr lang="en-US" altLang="zh-CN" sz="1000" b="0" dirty="0">
                 <a:solidFill>
                   <a:srgbClr val="FFFFFF"/>
                 </a:solidFill>
                 <a:latin typeface="JetBrains Mono"/>
               </a:rPr>
-              <a:t>CRM</a:t>
-            </a:r>
+              <a:t>APS</a:t>
+            </a:r>
+            <a:endParaRPr sz="1000" b="0" dirty="0">
+              <a:solidFill>
+                <a:srgbClr val="FFFFFF"/>
+              </a:solidFill>
+              <a:latin typeface="JetBrains Mono"/>
+            </a:endParaRPr>
           </a:p>
         </p:txBody>
       </p:sp>
@@ -5814,7 +5827,7 @@
           </a:fontRef>
         </p:style>
         <p:txBody>
-          <a:bodyPr rtlCol="0" anchor="ctr" lIns="36576" rIns="36576" tIns="18288" bIns="18288" wrap="square"/>
+          <a:bodyPr wrap="square" lIns="36576" tIns="18288" rIns="36576" bIns="18288" rtlCol="0" anchor="ctr"/>
           <a:lstStyle/>
           <a:p>
             <a:pPr algn="ctr"/>
@@ -5869,7 +5882,7 @@
           </a:fontRef>
         </p:style>
         <p:txBody>
-          <a:bodyPr rtlCol="0" anchor="ctr" lIns="36576" rIns="36576" tIns="18288" bIns="18288" wrap="square"/>
+          <a:bodyPr wrap="square" lIns="36576" tIns="18288" rIns="36576" bIns="18288" rtlCol="0" anchor="ctr"/>
           <a:lstStyle/>
           <a:p>
             <a:pPr algn="ctr"/>
@@ -5924,7 +5937,7 @@
           </a:fontRef>
         </p:style>
         <p:txBody>
-          <a:bodyPr rtlCol="0" anchor="ctr" lIns="36576" rIns="36576" tIns="18288" bIns="18288" wrap="square"/>
+          <a:bodyPr wrap="square" lIns="36576" tIns="18288" rIns="36576" bIns="18288" rtlCol="0" anchor="ctr"/>
           <a:lstStyle/>
           <a:p>
             <a:pPr algn="ctr"/>
@@ -5979,7 +5992,7 @@
           </a:fontRef>
         </p:style>
         <p:txBody>
-          <a:bodyPr rtlCol="0" anchor="ctr" lIns="36576" rIns="36576" tIns="18288" bIns="18288" wrap="square"/>
+          <a:bodyPr wrap="square" lIns="36576" tIns="18288" rIns="36576" bIns="18288" rtlCol="0" anchor="ctr"/>
           <a:lstStyle/>
           <a:p>
             <a:pPr algn="ctr"/>
@@ -6034,7 +6047,7 @@
           </a:fontRef>
         </p:style>
         <p:txBody>
-          <a:bodyPr rtlCol="0" anchor="ctr" lIns="36576" rIns="36576" tIns="18288" bIns="18288" wrap="square"/>
+          <a:bodyPr wrap="square" lIns="36576" tIns="18288" rIns="36576" bIns="18288" rtlCol="0" anchor="ctr"/>
           <a:lstStyle/>
           <a:p>
             <a:pPr algn="ctr"/>
@@ -6093,6 +6106,7 @@
           <a:lstStyle/>
           <a:p>
             <a:pPr algn="ctr"/>
+            <a:endParaRPr/>
           </a:p>
         </p:txBody>
       </p:sp>
@@ -6113,7 +6127,7 @@
           <a:noFill/>
         </p:spPr>
         <p:txBody>
-          <a:bodyPr wrap="square" lIns="0" rIns="0" tIns="0" bIns="0">
+          <a:bodyPr wrap="square" lIns="0" tIns="0" rIns="0" bIns="0">
             <a:spAutoFit/>
           </a:bodyPr>
           <a:lstStyle/>
@@ -6170,7 +6184,7 @@
           </a:fontRef>
         </p:style>
         <p:txBody>
-          <a:bodyPr rtlCol="0" anchor="ctr" lIns="36576" rIns="36576" tIns="18288" bIns="18288" wrap="square"/>
+          <a:bodyPr wrap="square" lIns="36576" tIns="18288" rIns="36576" bIns="18288" rtlCol="0" anchor="ctr"/>
           <a:lstStyle/>
           <a:p>
             <a:pPr algn="ctr"/>
@@ -6225,7 +6239,7 @@
           </a:fontRef>
         </p:style>
         <p:txBody>
-          <a:bodyPr rtlCol="0" anchor="ctr" lIns="36576" rIns="36576" tIns="18288" bIns="18288" wrap="square"/>
+          <a:bodyPr wrap="square" lIns="36576" tIns="18288" rIns="36576" bIns="18288" rtlCol="0" anchor="ctr"/>
           <a:lstStyle/>
           <a:p>
             <a:pPr algn="ctr"/>
@@ -6280,7 +6294,7 @@
           </a:fontRef>
         </p:style>
         <p:txBody>
-          <a:bodyPr rtlCol="0" anchor="ctr" lIns="36576" rIns="36576" tIns="18288" bIns="18288" wrap="square"/>
+          <a:bodyPr wrap="square" lIns="36576" tIns="18288" rIns="36576" bIns="18288" rtlCol="0" anchor="ctr"/>
           <a:lstStyle/>
           <a:p>
             <a:pPr algn="ctr"/>
@@ -6335,7 +6349,7 @@
           </a:fontRef>
         </p:style>
         <p:txBody>
-          <a:bodyPr rtlCol="0" anchor="ctr" lIns="36576" rIns="36576" tIns="18288" bIns="18288" wrap="square"/>
+          <a:bodyPr wrap="square" lIns="36576" tIns="18288" rIns="36576" bIns="18288" rtlCol="0" anchor="ctr"/>
           <a:lstStyle/>
           <a:p>
             <a:pPr algn="ctr"/>
@@ -6390,7 +6404,7 @@
           </a:fontRef>
         </p:style>
         <p:txBody>
-          <a:bodyPr rtlCol="0" anchor="ctr" lIns="36576" rIns="36576" tIns="18288" bIns="18288" wrap="square"/>
+          <a:bodyPr wrap="square" lIns="36576" tIns="18288" rIns="36576" bIns="18288" rtlCol="0" anchor="ctr"/>
           <a:lstStyle/>
           <a:p>
             <a:pPr algn="ctr"/>
@@ -6445,7 +6459,7 @@
           </a:fontRef>
         </p:style>
         <p:txBody>
-          <a:bodyPr rtlCol="0" anchor="ctr" lIns="36576" rIns="36576" tIns="18288" bIns="18288" wrap="square"/>
+          <a:bodyPr wrap="square" lIns="36576" tIns="18288" rIns="36576" bIns="18288" rtlCol="0" anchor="ctr"/>
           <a:lstStyle/>
           <a:p>
             <a:pPr algn="ctr"/>
@@ -6500,7 +6514,7 @@
           </a:fontRef>
         </p:style>
         <p:txBody>
-          <a:bodyPr rtlCol="0" anchor="ctr" lIns="36576" rIns="36576" tIns="18288" bIns="18288" wrap="square"/>
+          <a:bodyPr wrap="square" lIns="36576" tIns="18288" rIns="36576" bIns="18288" rtlCol="0" anchor="ctr"/>
           <a:lstStyle/>
           <a:p>
             <a:pPr algn="ctr"/>
@@ -6535,7 +6549,6 @@
               <a:srgbClr val="A78BFA"/>
             </a:solidFill>
             <a:tailEnd type="triangle" w="med" len="med"/>
-            <a:headEnd type="triangle" w="med" len="med"/>
           </a:ln>
         </p:spPr>
         <p:style>
@@ -6570,7 +6583,7 @@
           <a:noFill/>
         </p:spPr>
         <p:txBody>
-          <a:bodyPr wrap="square" lIns="0" rIns="0" tIns="0" bIns="0">
+          <a:bodyPr wrap="square" lIns="0" tIns="0" rIns="0" bIns="0">
             <a:spAutoFit/>
           </a:bodyPr>
           <a:lstStyle/>
@@ -6627,7 +6640,7 @@
           </a:fontRef>
         </p:style>
         <p:txBody>
-          <a:bodyPr rtlCol="0" anchor="ctr" lIns="36576" rIns="36576" tIns="18288" bIns="18288" wrap="square"/>
+          <a:bodyPr wrap="square" lIns="36576" tIns="18288" rIns="36576" bIns="18288" rtlCol="0" anchor="ctr"/>
           <a:lstStyle/>
           <a:p>
             <a:pPr algn="ctr"/>
@@ -6674,7 +6687,6 @@
               <a:srgbClr val="A78BFA"/>
             </a:solidFill>
             <a:tailEnd type="triangle" w="med" len="med"/>
-            <a:headEnd type="triangle" w="med" len="med"/>
           </a:ln>
         </p:spPr>
         <p:style>
@@ -6711,7 +6723,6 @@
               <a:srgbClr val="A78BFA"/>
             </a:solidFill>
             <a:tailEnd type="triangle" w="med" len="med"/>
-            <a:headEnd type="triangle" w="med" len="med"/>
           </a:ln>
         </p:spPr>
         <p:style>
@@ -6746,7 +6757,7 @@
           <a:noFill/>
         </p:spPr>
         <p:txBody>
-          <a:bodyPr wrap="square" lIns="0" rIns="0" tIns="0" bIns="0">
+          <a:bodyPr wrap="square" lIns="0" tIns="0" rIns="0" bIns="0">
             <a:spAutoFit/>
           </a:bodyPr>
           <a:lstStyle/>
@@ -6807,6 +6818,7 @@
           <a:lstStyle/>
           <a:p>
             <a:pPr algn="ctr"/>
+            <a:endParaRPr/>
           </a:p>
         </p:txBody>
       </p:sp>
@@ -6827,7 +6839,7 @@
           <a:noFill/>
         </p:spPr>
         <p:txBody>
-          <a:bodyPr wrap="square" lIns="0" rIns="0" tIns="0" bIns="0">
+          <a:bodyPr wrap="square" lIns="0" tIns="0" rIns="0" bIns="0">
             <a:spAutoFit/>
           </a:bodyPr>
           <a:lstStyle/>
@@ -6888,6 +6900,7 @@
           <a:lstStyle/>
           <a:p>
             <a:pPr algn="ctr"/>
+            <a:endParaRPr/>
           </a:p>
         </p:txBody>
       </p:sp>
@@ -6908,7 +6921,7 @@
           <a:noFill/>
         </p:spPr>
         <p:txBody>
-          <a:bodyPr wrap="square" lIns="0" rIns="0" tIns="0" bIns="0">
+          <a:bodyPr wrap="square" lIns="0" tIns="0" rIns="0" bIns="0">
             <a:spAutoFit/>
           </a:bodyPr>
           <a:lstStyle/>
@@ -6969,6 +6982,7 @@
           <a:lstStyle/>
           <a:p>
             <a:pPr algn="ctr"/>
+            <a:endParaRPr/>
           </a:p>
         </p:txBody>
       </p:sp>
@@ -6989,7 +7003,7 @@
           <a:noFill/>
         </p:spPr>
         <p:txBody>
-          <a:bodyPr wrap="square" lIns="0" rIns="0" tIns="0" bIns="0">
+          <a:bodyPr wrap="square" lIns="0" tIns="0" rIns="0" bIns="0">
             <a:spAutoFit/>
           </a:bodyPr>
           <a:lstStyle/>
@@ -7050,6 +7064,7 @@
           <a:lstStyle/>
           <a:p>
             <a:pPr algn="ctr"/>
+            <a:endParaRPr/>
           </a:p>
         </p:txBody>
       </p:sp>
@@ -7070,7 +7085,7 @@
           <a:noFill/>
         </p:spPr>
         <p:txBody>
-          <a:bodyPr wrap="square" lIns="0" rIns="0" tIns="0" bIns="0">
+          <a:bodyPr wrap="square" lIns="0" tIns="0" rIns="0" bIns="0">
             <a:spAutoFit/>
           </a:bodyPr>
           <a:lstStyle/>
@@ -7131,6 +7146,7 @@
           <a:lstStyle/>
           <a:p>
             <a:pPr algn="ctr"/>
+            <a:endParaRPr/>
           </a:p>
         </p:txBody>
       </p:sp>
@@ -7151,7 +7167,7 @@
           <a:noFill/>
         </p:spPr>
         <p:txBody>
-          <a:bodyPr wrap="square" lIns="0" rIns="0" tIns="0" bIns="0">
+          <a:bodyPr wrap="square" lIns="0" tIns="0" rIns="0" bIns="0">
             <a:spAutoFit/>
           </a:bodyPr>
           <a:lstStyle/>
@@ -7188,7 +7204,6 @@
               <a:srgbClr val="A78BFA"/>
             </a:solidFill>
             <a:tailEnd type="triangle" w="med" len="med"/>
-            <a:headEnd type="triangle" w="med" len="med"/>
           </a:ln>
         </p:spPr>
         <p:style>
@@ -7223,7 +7238,7 @@
           <a:noFill/>
         </p:spPr>
         <p:txBody>
-          <a:bodyPr wrap="square" lIns="0" rIns="0" tIns="0" bIns="0">
+          <a:bodyPr wrap="square" lIns="0" tIns="0" rIns="0" bIns="0">
             <a:spAutoFit/>
           </a:bodyPr>
           <a:lstStyle/>
@@ -7294,7 +7309,7 @@
           <a:noFill/>
         </p:spPr>
         <p:txBody>
-          <a:bodyPr wrap="square" lIns="0" rIns="0" tIns="0" bIns="0">
+          <a:bodyPr wrap="square" lIns="0" tIns="0" rIns="0" bIns="0">
             <a:spAutoFit/>
           </a:bodyPr>
           <a:lstStyle/>
@@ -7355,6 +7370,7 @@
           <a:lstStyle/>
           <a:p>
             <a:pPr algn="ctr"/>
+            <a:endParaRPr/>
           </a:p>
         </p:txBody>
       </p:sp>
@@ -7399,6 +7415,7 @@
           <a:lstStyle/>
           <a:p>
             <a:pPr algn="ctr"/>
+            <a:endParaRPr/>
           </a:p>
         </p:txBody>
       </p:sp>
@@ -7578,6 +7595,7 @@
           <a:lstStyle/>
           <a:p>
             <a:pPr algn="ctr"/>
+            <a:endParaRPr/>
           </a:p>
         </p:txBody>
       </p:sp>
@@ -7622,6 +7640,7 @@
           <a:lstStyle/>
           <a:p>
             <a:pPr algn="ctr"/>
+            <a:endParaRPr/>
           </a:p>
         </p:txBody>
       </p:sp>
@@ -7801,6 +7820,7 @@
           <a:lstStyle/>
           <a:p>
             <a:pPr algn="ctr"/>
+            <a:endParaRPr/>
           </a:p>
         </p:txBody>
       </p:sp>
@@ -7845,6 +7865,7 @@
           <a:lstStyle/>
           <a:p>
             <a:pPr algn="ctr"/>
+            <a:endParaRPr/>
           </a:p>
         </p:txBody>
       </p:sp>
